--- a/docs/presentaciones/classes/clase-195-versionado-de-modelos-y-experimentos-con-mlflow-presentacion.pptx
+++ b/docs/presentaciones/classes/clase-195-versionado-de-modelos-y-experimentos-con-mlflow-presentacion.pptx
@@ -3272,7 +3272,7 @@
                 </a:solidFill>
                 <a:latin typeface="Segoe UI"/>
               </a:rPr>
-              <a:t>Parte: 4 — MLOps · Fuente: Huyen, Designing Machine Learning Systems cap. 6 + 11 + docs MLflow 2.x.  Duración estimada: 75 min.</a:t>
+              <a:t>Parte: 4 — MLOps · Fuente: Huyen, Designing Machine Learning Systems cap. 6 + 11 + docs MLflow 2.x.  Duración estimada: 75 min. · Nivel: Avanzado</a:t>
             </a:r>
           </a:p>
         </p:txBody>
@@ -3581,7 +3581,7 @@
                 </a:solidFill>
                 <a:latin typeface="Segoe UI"/>
               </a:rPr>
-              <a:t>Parte: 4 — MLOps · Fuente: Huyen, Designing Machine Learning Systems cap. 6 + 11 + docs MLflow 2.x.  Duración estimada: 75 min.</a:t>
+              <a:t>Parte: 4 — MLOps · Fuente: Huyen, Designing Machine Learning Systems cap. 6 + 11 + docs MLflow 2.x.  Duración estimada: 75 min. · Nivel: Avanzado</a:t>
             </a:r>
           </a:p>
         </p:txBody>
